--- a/Cloud_File_Deduplication_College_Presentation.pptx
+++ b/Cloud_File_Deduplication_College_Presentation.pptx
@@ -3354,8 +3354,8 @@
         </p:nvSpPr>
         <p:spPr>
           <a:xfrm>
-            <a:off x="182880" y="182880"/>
-            <a:ext cx="11825935" cy="6492240"/>
+            <a:off x="164592" y="164592"/>
+            <a:ext cx="11862511" cy="6528816"/>
           </a:xfrm>
           <a:prstGeom prst="rect">
             <a:avLst/>
@@ -3363,7 +3363,7 @@
           <a:noFill/>
           <a:ln w="25400">
             <a:solidFill>
-              <a:srgbClr val="1A365D"/>
+              <a:srgbClr val="1E3A8A"/>
             </a:solidFill>
           </a:ln>
         </p:spPr>
@@ -4387,7 +4387,7 @@
               <a:rPr>
                 <a:latin typeface="Times New Roman"/>
               </a:rPr>
-              <a:t>64.74% Overall Space Reduction: Total logical volume of 4.8 MB consumed only 1.7 MB in cloud storage (2.84 : 1 compression ratio).</a:t>
+              <a:t>64.74% Overall Space Reduction: Total logical volume of 4.8 MB consumed only 1.7 MB on cloud storage (2.84 : 1 compression ratio).</a:t>
             </a:r>
           </a:p>
           <a:p>
@@ -4521,7 +4521,7 @@
               <a:rPr>
                 <a:latin typeface="Times New Roman"/>
               </a:rPr>
-              <a:t>Figure 5.1: Live File Catalog Showing 100% Duplicate Detection Badges in Real Time</a:t>
+              <a:t>Figure 5.1: Live Storage Optimization Overview &amp; 100% Deduplication Metrics</a:t>
             </a:r>
           </a:p>
           <a:p>
@@ -4558,7 +4558,7 @@
       </p:sp>
       <p:pic>
         <p:nvPicPr>
-          <p:cNvPr id="11" name="Picture 10" descr="screenshot_my_files.png"/>
+          <p:cNvPr id="11" name="Picture 10" descr="dashboard_stats_overview.png"/>
           <p:cNvPicPr>
             <a:picLocks noChangeAspect="1"/>
           </p:cNvPicPr>
@@ -4573,14 +4573,14 @@
         <p:spPr>
           <a:xfrm>
             <a:off x="7178040" y="1572768"/>
-            <a:ext cx="4389120" cy="2297430"/>
+            <a:ext cx="4389120" cy="5007813"/>
           </a:xfrm>
           <a:prstGeom prst="rect">
             <a:avLst/>
           </a:prstGeom>
           <a:ln w="19050">
             <a:solidFill>
-              <a:srgbClr val="1A365D"/>
+              <a:srgbClr val="1E3A8A"/>
             </a:solidFill>
           </a:ln>
         </p:spPr>
@@ -4593,8 +4593,8 @@
         </p:nvSpPr>
         <p:spPr>
           <a:xfrm>
-            <a:off x="182880" y="182880"/>
-            <a:ext cx="11825935" cy="6492240"/>
+            <a:off x="164592" y="164592"/>
+            <a:ext cx="11862511" cy="6528816"/>
           </a:xfrm>
           <a:prstGeom prst="rect">
             <a:avLst/>
@@ -4602,7 +4602,7 @@
           <a:noFill/>
           <a:ln w="25400">
             <a:solidFill>
-              <a:srgbClr val="1A365D"/>
+              <a:srgbClr val="1E3A8A"/>
             </a:solidFill>
           </a:ln>
         </p:spPr>
@@ -5310,8 +5310,8 @@
         </p:nvSpPr>
         <p:spPr>
           <a:xfrm>
-            <a:off x="182880" y="182880"/>
-            <a:ext cx="11825935" cy="6492240"/>
+            <a:off x="164592" y="164592"/>
+            <a:ext cx="11862511" cy="6528816"/>
           </a:xfrm>
           <a:prstGeom prst="rect">
             <a:avLst/>
@@ -5319,7 +5319,7 @@
           <a:noFill/>
           <a:ln w="25400">
             <a:solidFill>
-              <a:srgbClr val="1A365D"/>
+              <a:srgbClr val="1E3A8A"/>
             </a:solidFill>
           </a:ln>
         </p:spPr>
@@ -6083,8 +6083,8 @@
         </p:nvSpPr>
         <p:spPr>
           <a:xfrm>
-            <a:off x="182880" y="182880"/>
-            <a:ext cx="11825935" cy="6492240"/>
+            <a:off x="164592" y="164592"/>
+            <a:ext cx="11862511" cy="6528816"/>
           </a:xfrm>
           <a:prstGeom prst="rect">
             <a:avLst/>
@@ -6092,7 +6092,7 @@
           <a:noFill/>
           <a:ln w="25400">
             <a:solidFill>
-              <a:srgbClr val="1A365D"/>
+              <a:srgbClr val="1E3A8A"/>
             </a:solidFill>
           </a:ln>
         </p:spPr>
@@ -6287,8 +6287,8 @@
         </p:nvSpPr>
         <p:spPr>
           <a:xfrm>
-            <a:off x="182880" y="182880"/>
-            <a:ext cx="11825935" cy="6492240"/>
+            <a:off x="164592" y="164592"/>
+            <a:ext cx="11862511" cy="6528816"/>
           </a:xfrm>
           <a:prstGeom prst="rect">
             <a:avLst/>
@@ -6296,7 +6296,7 @@
           <a:noFill/>
           <a:ln w="25400">
             <a:solidFill>
-              <a:srgbClr val="1A365D"/>
+              <a:srgbClr val="1E3A8A"/>
             </a:solidFill>
           </a:ln>
         </p:spPr>
@@ -6913,8 +6913,8 @@
         </p:nvSpPr>
         <p:spPr>
           <a:xfrm>
-            <a:off x="182880" y="182880"/>
-            <a:ext cx="11825935" cy="6492240"/>
+            <a:off x="164592" y="164592"/>
+            <a:ext cx="11862511" cy="6528816"/>
           </a:xfrm>
           <a:prstGeom prst="rect">
             <a:avLst/>
@@ -6922,7 +6922,7 @@
           <a:noFill/>
           <a:ln w="25400">
             <a:solidFill>
-              <a:srgbClr val="1A365D"/>
+              <a:srgbClr val="1E3A8A"/>
             </a:solidFill>
           </a:ln>
         </p:spPr>
@@ -7461,8 +7461,8 @@
         </p:nvSpPr>
         <p:spPr>
           <a:xfrm>
-            <a:off x="182880" y="182880"/>
-            <a:ext cx="11825935" cy="6492240"/>
+            <a:off x="164592" y="164592"/>
+            <a:ext cx="11862511" cy="6528816"/>
           </a:xfrm>
           <a:prstGeom prst="rect">
             <a:avLst/>
@@ -7470,7 +7470,7 @@
           <a:noFill/>
           <a:ln w="25400">
             <a:solidFill>
-              <a:srgbClr val="1A365D"/>
+              <a:srgbClr val="1E3A8A"/>
             </a:solidFill>
           </a:ln>
         </p:spPr>
@@ -8106,8 +8106,8 @@
         </p:nvSpPr>
         <p:spPr>
           <a:xfrm>
-            <a:off x="182880" y="182880"/>
-            <a:ext cx="11825935" cy="6492240"/>
+            <a:off x="164592" y="164592"/>
+            <a:ext cx="11862511" cy="6528816"/>
           </a:xfrm>
           <a:prstGeom prst="rect">
             <a:avLst/>
@@ -8115,7 +8115,7 @@
           <a:noFill/>
           <a:ln w="25400">
             <a:solidFill>
-              <a:srgbClr val="1A365D"/>
+              <a:srgbClr val="1E3A8A"/>
             </a:solidFill>
           </a:ln>
         </p:spPr>
@@ -8787,8 +8787,8 @@
         </p:nvSpPr>
         <p:spPr>
           <a:xfrm>
-            <a:off x="182880" y="182880"/>
-            <a:ext cx="11825935" cy="6492240"/>
+            <a:off x="164592" y="164592"/>
+            <a:ext cx="11862511" cy="6528816"/>
           </a:xfrm>
           <a:prstGeom prst="rect">
             <a:avLst/>
@@ -8796,7 +8796,7 @@
           <a:noFill/>
           <a:ln w="25400">
             <a:solidFill>
-              <a:srgbClr val="1A365D"/>
+              <a:srgbClr val="1E3A8A"/>
             </a:solidFill>
           </a:ln>
         </p:spPr>
@@ -9402,45 +9402,16 @@
           </a:p>
         </p:txBody>
       </p:sp>
-      <p:pic>
-        <p:nvPicPr>
-          <p:cNvPr id="12" name="Picture 11" descr="screenshot_mysql_workbench.png"/>
-          <p:cNvPicPr>
-            <a:picLocks noChangeAspect="1"/>
-          </p:cNvPicPr>
-          <p:nvPr/>
-        </p:nvPicPr>
-        <p:blipFill>
-          <a:blip r:embed="rId2"/>
-          <a:stretch>
-            <a:fillRect/>
-          </a:stretch>
-        </p:blipFill>
-        <p:spPr>
-          <a:xfrm>
-            <a:off x="7772400" y="1645920"/>
-            <a:ext cx="3931920" cy="1820049"/>
-          </a:xfrm>
-          <a:prstGeom prst="rect">
-            <a:avLst/>
-          </a:prstGeom>
-          <a:ln w="19050">
-            <a:solidFill>
-              <a:srgbClr val="1A365D"/>
-            </a:solidFill>
-          </a:ln>
-        </p:spPr>
-      </p:pic>
-      <p:sp>
-        <p:nvSpPr>
-          <p:cNvPr id="13" name="Rectangle 12"/>
+      <p:sp>
+        <p:nvSpPr>
+          <p:cNvPr id="12" name="Rectangle 11"/>
           <p:cNvSpPr/>
           <p:nvPr/>
         </p:nvSpPr>
         <p:spPr>
           <a:xfrm>
-            <a:off x="182880" y="182880"/>
-            <a:ext cx="11825935" cy="6492240"/>
+            <a:off x="164592" y="164592"/>
+            <a:ext cx="11862511" cy="6528816"/>
           </a:xfrm>
           <a:prstGeom prst="rect">
             <a:avLst/>
@@ -9448,7 +9419,7 @@
           <a:noFill/>
           <a:ln w="25400">
             <a:solidFill>
-              <a:srgbClr val="1A365D"/>
+              <a:srgbClr val="1E3A8A"/>
             </a:solidFill>
           </a:ln>
         </p:spPr>
@@ -10240,8 +10211,8 @@
         </p:nvSpPr>
         <p:spPr>
           <a:xfrm>
-            <a:off x="182880" y="182880"/>
-            <a:ext cx="11825935" cy="6492240"/>
+            <a:off x="164592" y="164592"/>
+            <a:ext cx="11862511" cy="6528816"/>
           </a:xfrm>
           <a:prstGeom prst="rect">
             <a:avLst/>
@@ -10249,7 +10220,7 @@
           <a:noFill/>
           <a:ln w="25400">
             <a:solidFill>
-              <a:srgbClr val="1A365D"/>
+              <a:srgbClr val="1E3A8A"/>
             </a:solidFill>
           </a:ln>
         </p:spPr>
@@ -10921,8 +10892,8 @@
         </p:nvSpPr>
         <p:spPr>
           <a:xfrm>
-            <a:off x="182880" y="182880"/>
-            <a:ext cx="11825935" cy="6492240"/>
+            <a:off x="164592" y="164592"/>
+            <a:ext cx="11862511" cy="6528816"/>
           </a:xfrm>
           <a:prstGeom prst="rect">
             <a:avLst/>
@@ -10930,7 +10901,7 @@
           <a:noFill/>
           <a:ln w="25400">
             <a:solidFill>
-              <a:srgbClr val="1A365D"/>
+              <a:srgbClr val="1E3A8A"/>
             </a:solidFill>
           </a:ln>
         </p:spPr>
@@ -11250,7 +11221,7 @@
               <a:rPr>
                 <a:latin typeface="Times New Roman"/>
               </a:rPr>
-              <a:t>Figure 4.1: CloudDedup Live Real-Time Storage Optimization Dashboard (Dark Theme)</a:t>
+              <a:t>Figure 4.1: CloudDedup Live Real-Time Storage Optimization Dashboard</a:t>
             </a:r>
           </a:p>
         </p:txBody>
@@ -11439,7 +11410,7 @@
       </p:sp>
       <p:pic>
         <p:nvPicPr>
-          <p:cNvPr id="10" name="Picture 9" descr="screenshot_dashboard.png"/>
+          <p:cNvPr id="10" name="Picture 9" descr="dashboard_screenshot.png"/>
           <p:cNvPicPr>
             <a:picLocks noChangeAspect="1"/>
           </p:cNvPicPr>
@@ -11454,14 +11425,14 @@
         <p:spPr>
           <a:xfrm>
             <a:off x="731520" y="1600200"/>
-            <a:ext cx="6675120" cy="3689568"/>
+            <a:ext cx="6675120" cy="3846016"/>
           </a:xfrm>
           <a:prstGeom prst="rect">
             <a:avLst/>
           </a:prstGeom>
           <a:ln w="19050">
             <a:solidFill>
-              <a:srgbClr val="1A365D"/>
+              <a:srgbClr val="1E3A8A"/>
             </a:solidFill>
           </a:ln>
         </p:spPr>
@@ -11474,8 +11445,8 @@
         </p:nvSpPr>
         <p:spPr>
           <a:xfrm>
-            <a:off x="182880" y="182880"/>
-            <a:ext cx="11825935" cy="6492240"/>
+            <a:off x="164592" y="164592"/>
+            <a:ext cx="11862511" cy="6528816"/>
           </a:xfrm>
           <a:prstGeom prst="rect">
             <a:avLst/>
@@ -11483,7 +11454,7 @@
           <a:noFill/>
           <a:ln w="25400">
             <a:solidFill>
-              <a:srgbClr val="1A365D"/>
+              <a:srgbClr val="1E3A8A"/>
             </a:solidFill>
           </a:ln>
         </p:spPr>
